--- a/docs/fdrm_vix_presentation.pptx
+++ b/docs/fdrm_vix_presentation.pptx
@@ -4978,7 +4978,7 @@
                   <a:schemeClr val="bg2"/>
                 </a:solidFill>
               </a:rPr>
-              <a:t>FDRM assignment  ·  October 2026</a:t>
+              <a:t>FDRM course project  ·  Group 8, IIT Jodhpur  ·  October 2026</a:t>
             </a:r>
             <a:endParaRPr lang="en-US" sz="2000" dirty="0"/>
           </a:p>

--- a/docs/fdrm_vix_presentation.pptx
+++ b/docs/fdrm_vix_presentation.pptx
@@ -4978,7 +4978,7 @@
                   <a:schemeClr val="bg2"/>
                 </a:solidFill>
               </a:rPr>
-              <a:t>FDRM course project  ·  Group 8, IIT Jodhpur  ·  October 2026</a:t>
+              <a:t>FDRM course project  ·  Group 8, IIT Jodhpur</a:t>
             </a:r>
             <a:endParaRPr lang="en-US" sz="2000" dirty="0"/>
           </a:p>
